--- a/curso_es/pptx/S49.pptx
+++ b/curso_es/pptx/S49.pptx
@@ -3717,7 +3717,7 @@
                 </a:solidFill>
                 <a:latin typeface="Fredoka"/>
               </a:rPr>
-              <a:t>Caso 1 · El móvil de Dylan</a:t>
+              <a:t>Caso 1 · El móvil de un chico</a:t>
             </a:r>
           </a:p>
         </p:txBody>
@@ -3799,7 +3799,7 @@
                 </a:solidFill>
                 <a:latin typeface="Nunito Sans"/>
               </a:rPr>
-              <a:t>Dylan quiere un móvil nuevo. Le dice a su padre: «El mío tiene 5 años, la batería dura 2 horas y arreglarla cuesta casi lo mismo».</a:t>
+              <a:t>Un chico quiere un móvil nuevo. Le dice a su padre: «El mío tiene 5 años, la batería dura 2 horas y arreglarla cuesta casi lo mismo».</a:t>
             </a:r>
           </a:p>
         </p:txBody>
@@ -3847,7 +3847,7 @@
                 </a:solidFill>
                 <a:latin typeface="Nunito Sans"/>
               </a:rPr>
-              <a:t>¿Qué quiere Dylan? Que su padre le compre un móvil.</a:t>
+              <a:t>¿Qué quiere el chico? Que su padre le compre un móvil.</a:t>
             </a:r>
           </a:p>
           <a:p>
@@ -3922,7 +3922,7 @@
                 </a:solidFill>
                 <a:latin typeface="Nunito Sans"/>
               </a:rPr>
-              <a:t>Conclusión: Dylan intenta convencer. Da razones y deja pensar a su padre.</a:t>
+              <a:t>Conclusión: el chico intenta convencer. Da razones y deja pensar a su padre.</a:t>
             </a:r>
           </a:p>
         </p:txBody>
@@ -4521,7 +4521,7 @@
                 </a:solidFill>
                 <a:latin typeface="Nunito Sans"/>
               </a:rPr>
-              <a:t>Una campaña contra el acoso escolar enseña a una chica comiendo sola en el patio. Da datos reales y un teléfono de ayuda.</a:t>
+              <a:t>Una campaña contra el abandono de animales enseña a un perro atado en una gasolinera. Da datos reales y un teléfono de ayuda.</a:t>
             </a:r>
           </a:p>
         </p:txBody>
